--- a/assets/figures-editable/c1-c2/c2-e23.pptx
+++ b/assets/figures-editable/c1-c2/c2-e23.pptx
@@ -7,7 +7,7 @@
   <p:sldIdLst>
     <p:sldId id="256" r:id="rId7"/>
   </p:sldIdLst>
-  <p:sldSz cx="11948160" cy="7924799" type="screen4x3"/>
+  <p:sldSz cx="12191695" cy="6858000" type="screen4x3"/>
   <p:notesSz cx="6858000" cy="9144000"/>
   <p:defaultTextStyle>
     <a:defPPr>
@@ -3098,14 +3098,14 @@
       <p:grpSpPr/>
       <p:sp>
         <p:nvSpPr>
-          <p:cNvPr id="2" name="text1" descr="sci-ppt:C2-E23-001"/>
+          <p:cNvPr id="2" name="C2-E23 text 0" descr="sci-ppt:o000"/>
           <p:cNvSpPr txBox="1"/>
           <p:nvPr/>
         </p:nvSpPr>
         <p:spPr>
           <a:xfrm>
-            <a:off x="316992" y="268224"/>
-            <a:ext cx="11277600" cy="359054"/>
+            <a:off x="274320" y="118872"/>
+            <a:ext cx="11612880" cy="340105"/>
           </a:xfrm>
           <a:prstGeom prst="rect">
             <a:avLst/>
@@ -3114,7 +3114,7 @@
           <a:effectLst/>
         </p:spPr>
         <p:txBody>
-          <a:bodyPr wrap="none" lIns="27432" rIns="27432" tIns="18288" bIns="18288" anchor="ctr">
+          <a:bodyPr wrap="none" lIns="18288" rIns="18288" tIns="18288" bIns="18288" anchor="t">
             <a:spAutoFit/>
           </a:bodyPr>
           <a:lstStyle/>
@@ -3125,34 +3125,439 @@
               </a:spcAft>
             </a:pPr>
             <a:r>
-              <a:rPr sz="1823" b="0" i="0">
+              <a:rPr sz="1900" b="1" i="0">
                 <a:solidFill>
                   <a:srgbClr val="8EDBD4"/>
                 </a:solidFill>
                 <a:latin typeface="Arial"/>
               </a:rPr>
-              <a:t>C2-E23 | Physical-variable diagram</a:t>
-            </a:r>
-          </a:p>
-        </p:txBody>
-      </p:sp>
-      <p:sp>
-        <p:nvSpPr>
-          <p:cNvPr id="3" name="rect2" descr="sci-ppt:C2-E23-002"/>
+              <a:t>C2-E23 · Product-rule derivation of thermal closure</a:t>
+            </a:r>
+          </a:p>
+        </p:txBody>
+      </p:sp>
+      <p:sp>
+        <p:nvSpPr>
+          <p:cNvPr id="3" name="C2-E23 round_rect 1" descr="sci-ppt:o001"/>
           <p:cNvSpPr/>
           <p:nvPr/>
         </p:nvSpPr>
         <p:spPr>
           <a:xfrm>
-            <a:off x="4023360" y="1950720"/>
-            <a:ext cx="3657600" cy="1341120"/>
-          </a:xfrm>
-          <a:prstGeom prst="rect">
+            <a:off x="365760" y="914400"/>
+            <a:ext cx="5120640" cy="4937760"/>
+          </a:xfrm>
+          <a:prstGeom prst="roundRect">
             <a:avLst/>
           </a:prstGeom>
           <a:solidFill>
             <a:srgbClr val="213E4B"/>
           </a:solidFill>
+          <a:ln w="20320">
+            <a:solidFill>
+              <a:srgbClr val="8EDBD4"/>
+            </a:solidFill>
+          </a:ln>
+          <a:effectLst/>
+        </p:spPr>
+        <p:txBody>
+          <a:bodyPr rtlCol="0" anchor="ctr"/>
+          <a:lstStyle/>
+          <a:p>
+            <a:pPr algn="ctr"/>
+          </a:p>
+        </p:txBody>
+      </p:sp>
+      <p:sp>
+        <p:nvSpPr>
+          <p:cNvPr id="4" name="C2-E23 text 2" descr="sci-ppt:o002"/>
+          <p:cNvSpPr txBox="1"/>
+          <p:nvPr/>
+        </p:nvSpPr>
+        <p:spPr>
+          <a:xfrm>
+            <a:off x="475488" y="969264"/>
+            <a:ext cx="4901183" cy="254889"/>
+          </a:xfrm>
+          <a:prstGeom prst="rect">
+            <a:avLst/>
+          </a:prstGeom>
+          <a:noFill/>
+          <a:effectLst/>
+        </p:spPr>
+        <p:txBody>
+          <a:bodyPr wrap="none" lIns="18288" rIns="18288" tIns="18288" bIns="18288" anchor="t">
+            <a:spAutoFit/>
+          </a:bodyPr>
+          <a:lstStyle/>
+          <a:p>
+            <a:pPr algn="l">
+              <a:spcAft>
+                <a:spcPts val="0"/>
+              </a:spcAft>
+            </a:pPr>
+            <a:r>
+              <a:rPr sz="1350" b="1" i="0">
+                <a:solidFill>
+                  <a:srgbClr val="8EDBD4"/>
+                </a:solidFill>
+                <a:latin typeface="Arial"/>
+              </a:rPr>
+              <a:t>From U_b to a temperature equation</a:t>
+            </a:r>
+          </a:p>
+        </p:txBody>
+      </p:sp>
+      <p:sp>
+        <p:nvSpPr>
+          <p:cNvPr id="5" name="C2-E23 text 3" descr="sci-ppt:o003"/>
+          <p:cNvSpPr txBox="1"/>
+          <p:nvPr/>
+        </p:nvSpPr>
+        <p:spPr>
+          <a:xfrm>
+            <a:off x="548640" y="1371600"/>
+            <a:ext cx="4754880" cy="239395"/>
+          </a:xfrm>
+          <a:prstGeom prst="rect">
+            <a:avLst/>
+          </a:prstGeom>
+          <a:noFill/>
+          <a:effectLst/>
+        </p:spPr>
+        <p:txBody>
+          <a:bodyPr wrap="none" lIns="18288" rIns="18288" tIns="18288" bIns="18288" anchor="t">
+            <a:spAutoFit/>
+          </a:bodyPr>
+          <a:lstStyle/>
+          <a:p>
+            <a:pPr algn="l">
+              <a:spcAft>
+                <a:spcPts val="0"/>
+              </a:spcAft>
+            </a:pPr>
+            <a:r>
+              <a:rPr sz="1250" b="1" i="0">
+                <a:solidFill>
+                  <a:srgbClr val="F2B880"/>
+                </a:solidFill>
+                <a:latin typeface="Arial"/>
+              </a:rPr>
+              <a:t>Internal energy</a:t>
+            </a:r>
+          </a:p>
+        </p:txBody>
+      </p:sp>
+      <p:sp>
+        <p:nvSpPr>
+          <p:cNvPr id="6" name="C2-E23 text 4" descr="sci-ppt:o004"/>
+          <p:cNvSpPr txBox="1"/>
+          <p:nvPr/>
+        </p:nvSpPr>
+        <p:spPr>
+          <a:xfrm>
+            <a:off x="777240" y="1673352"/>
+            <a:ext cx="4572000" cy="239395"/>
+          </a:xfrm>
+          <a:prstGeom prst="rect">
+            <a:avLst/>
+          </a:prstGeom>
+          <a:noFill/>
+          <a:effectLst/>
+        </p:spPr>
+        <p:txBody>
+          <a:bodyPr wrap="none" lIns="18288" rIns="18288" tIns="18288" bIns="18288" anchor="t">
+            <a:spAutoFit/>
+          </a:bodyPr>
+          <a:lstStyle/>
+          <a:p>
+            <a:pPr algn="l">
+              <a:spcAft>
+                <a:spcPts val="0"/>
+              </a:spcAft>
+            </a:pPr>
+            <a:r>
+              <a:rPr sz="1250" b="0" i="0">
+                <a:solidFill>
+                  <a:srgbClr val="E7F0F3"/>
+                </a:solidFill>
+                <a:latin typeface="Arial"/>
+              </a:rPr>
+              <a:t>U_b = Σ mᵥ,s eₛ(T_b)</a:t>
+            </a:r>
+          </a:p>
+        </p:txBody>
+      </p:sp>
+      <p:sp>
+        <p:nvSpPr>
+          <p:cNvPr id="7" name="C2-E23 text 5" descr="sci-ppt:o005"/>
+          <p:cNvSpPr txBox="1"/>
+          <p:nvPr/>
+        </p:nvSpPr>
+        <p:spPr>
+          <a:xfrm>
+            <a:off x="548640" y="2187067"/>
+            <a:ext cx="4754880" cy="239395"/>
+          </a:xfrm>
+          <a:prstGeom prst="rect">
+            <a:avLst/>
+          </a:prstGeom>
+          <a:noFill/>
+          <a:effectLst/>
+        </p:spPr>
+        <p:txBody>
+          <a:bodyPr wrap="none" lIns="18288" rIns="18288" tIns="18288" bIns="18288" anchor="t">
+            <a:spAutoFit/>
+          </a:bodyPr>
+          <a:lstStyle/>
+          <a:p>
+            <a:pPr algn="l">
+              <a:spcAft>
+                <a:spcPts val="0"/>
+              </a:spcAft>
+            </a:pPr>
+            <a:r>
+              <a:rPr sz="1250" b="1" i="0">
+                <a:solidFill>
+                  <a:srgbClr val="F2B880"/>
+                </a:solidFill>
+                <a:latin typeface="Arial"/>
+              </a:rPr>
+              <a:t>Product rule</a:t>
+            </a:r>
+          </a:p>
+        </p:txBody>
+      </p:sp>
+      <p:sp>
+        <p:nvSpPr>
+          <p:cNvPr id="8" name="C2-E23 text 6" descr="sci-ppt:o006"/>
+          <p:cNvSpPr txBox="1"/>
+          <p:nvPr/>
+        </p:nvSpPr>
+        <p:spPr>
+          <a:xfrm>
+            <a:off x="777240" y="2488819"/>
+            <a:ext cx="4572000" cy="239395"/>
+          </a:xfrm>
+          <a:prstGeom prst="rect">
+            <a:avLst/>
+          </a:prstGeom>
+          <a:noFill/>
+          <a:effectLst/>
+        </p:spPr>
+        <p:txBody>
+          <a:bodyPr wrap="none" lIns="18288" rIns="18288" tIns="18288" bIns="18288" anchor="t">
+            <a:spAutoFit/>
+          </a:bodyPr>
+          <a:lstStyle/>
+          <a:p>
+            <a:pPr algn="l">
+              <a:spcAft>
+                <a:spcPts val="0"/>
+              </a:spcAft>
+            </a:pPr>
+            <a:r>
+              <a:rPr sz="1250" b="0" i="0">
+                <a:solidFill>
+                  <a:srgbClr val="E7F0F3"/>
+                </a:solidFill>
+                <a:latin typeface="Arial"/>
+              </a:rPr>
+              <a:t>U̇_b = (Σ m cᵥ) Ṫ_b + Σ eₛ ṁᵥ,s</a:t>
+            </a:r>
+          </a:p>
+        </p:txBody>
+      </p:sp>
+      <p:sp>
+        <p:nvSpPr>
+          <p:cNvPr id="9" name="C2-E23 text 7" descr="sci-ppt:o007"/>
+          <p:cNvSpPr txBox="1"/>
+          <p:nvPr/>
+        </p:nvSpPr>
+        <p:spPr>
+          <a:xfrm>
+            <a:off x="548640" y="3002534"/>
+            <a:ext cx="4754880" cy="239395"/>
+          </a:xfrm>
+          <a:prstGeom prst="rect">
+            <a:avLst/>
+          </a:prstGeom>
+          <a:noFill/>
+          <a:effectLst/>
+        </p:spPr>
+        <p:txBody>
+          <a:bodyPr wrap="none" lIns="18288" rIns="18288" tIns="18288" bIns="18288" anchor="t">
+            <a:spAutoFit/>
+          </a:bodyPr>
+          <a:lstStyle/>
+          <a:p>
+            <a:pPr algn="l">
+              <a:spcAft>
+                <a:spcPts val="0"/>
+              </a:spcAft>
+            </a:pPr>
+            <a:r>
+              <a:rPr sz="1250" b="1" i="0">
+                <a:solidFill>
+                  <a:srgbClr val="F2B880"/>
+                </a:solidFill>
+                <a:latin typeface="Arial"/>
+              </a:rPr>
+              <a:t>Insert the first law</a:t>
+            </a:r>
+          </a:p>
+        </p:txBody>
+      </p:sp>
+      <p:sp>
+        <p:nvSpPr>
+          <p:cNvPr id="10" name="C2-E23 text 8" descr="sci-ppt:o008"/>
+          <p:cNvSpPr txBox="1"/>
+          <p:nvPr/>
+        </p:nvSpPr>
+        <p:spPr>
+          <a:xfrm>
+            <a:off x="777240" y="3304286"/>
+            <a:ext cx="4572000" cy="239395"/>
+          </a:xfrm>
+          <a:prstGeom prst="rect">
+            <a:avLst/>
+          </a:prstGeom>
+          <a:noFill/>
+          <a:effectLst/>
+        </p:spPr>
+        <p:txBody>
+          <a:bodyPr wrap="none" lIns="18288" rIns="18288" tIns="18288" bIns="18288" anchor="t">
+            <a:spAutoFit/>
+          </a:bodyPr>
+          <a:lstStyle/>
+          <a:p>
+            <a:pPr algn="l">
+              <a:spcAft>
+                <a:spcPts val="0"/>
+              </a:spcAft>
+            </a:pPr>
+            <a:r>
+              <a:rPr sz="1250" b="0" i="0">
+                <a:solidFill>
+                  <a:srgbClr val="E7F0F3"/>
+                </a:solidFill>
+                <a:latin typeface="Arial"/>
+              </a:rPr>
+              <a:t>(Σ m cᵥ) Ṫ_b = Q̇_b − p_b V̇_b + Σ (hᵥ,s − eₛ) ṁᵥ,s</a:t>
+            </a:r>
+          </a:p>
+        </p:txBody>
+      </p:sp>
+      <p:sp>
+        <p:nvSpPr>
+          <p:cNvPr id="11" name="C2-E23 text 9" descr="sci-ppt:o009"/>
+          <p:cNvSpPr txBox="1"/>
+          <p:nvPr/>
+        </p:nvSpPr>
+        <p:spPr>
+          <a:xfrm>
+            <a:off x="548640" y="3818001"/>
+            <a:ext cx="4754880" cy="417576"/>
+          </a:xfrm>
+          <a:prstGeom prst="rect">
+            <a:avLst/>
+          </a:prstGeom>
+          <a:noFill/>
+          <a:effectLst/>
+        </p:spPr>
+        <p:txBody>
+          <a:bodyPr wrap="none" lIns="18288" rIns="18288" tIns="18288" bIns="18288" anchor="t">
+            <a:spAutoFit/>
+          </a:bodyPr>
+          <a:lstStyle/>
+          <a:p>
+            <a:pPr algn="l">
+              <a:spcAft>
+                <a:spcPts val="0"/>
+              </a:spcAft>
+            </a:pPr>
+            <a:r>
+              <a:rPr sz="1200" b="0" i="0">
+                <a:solidFill>
+                  <a:srgbClr val="B4C7D2"/>
+                </a:solidFill>
+                <a:latin typeface="Arial"/>
+              </a:rPr>
+              <a:t>For an ideal vapor h − e = Rᵤ T / M = 9.3 kJ/kg at 323 K,</a:t>
+            </a:r>
+          </a:p>
+          <a:p>
+            <a:pPr algn="l">
+              <a:spcAft>
+                <a:spcPts val="0"/>
+              </a:spcAft>
+            </a:pPr>
+            <a:r>
+              <a:rPr sz="1200" b="0" i="0">
+                <a:solidFill>
+                  <a:srgbClr val="B4C7D2"/>
+                </a:solidFill>
+                <a:latin typeface="Arial"/>
+              </a:rPr>
+              <a:t>so every mass added also carries the work term.</a:t>
+            </a:r>
+          </a:p>
+        </p:txBody>
+      </p:sp>
+      <p:sp>
+        <p:nvSpPr>
+          <p:cNvPr id="12" name="C2-E23 text 10" descr="sci-ppt:o010"/>
+          <p:cNvSpPr txBox="1"/>
+          <p:nvPr/>
+        </p:nvSpPr>
+        <p:spPr>
+          <a:xfrm>
+            <a:off x="5760720" y="960120"/>
+            <a:ext cx="6035040" cy="247142"/>
+          </a:xfrm>
+          <a:prstGeom prst="rect">
+            <a:avLst/>
+          </a:prstGeom>
+          <a:noFill/>
+          <a:effectLst/>
+        </p:spPr>
+        <p:txBody>
+          <a:bodyPr wrap="none" lIns="18288" rIns="18288" tIns="18288" bIns="18288" anchor="t">
+            <a:spAutoFit/>
+          </a:bodyPr>
+          <a:lstStyle/>
+          <a:p>
+            <a:pPr algn="l">
+              <a:spcAft>
+                <a:spcPts val="0"/>
+              </a:spcAft>
+            </a:pPr>
+            <a:r>
+              <a:rPr sz="1300" b="1" i="0">
+                <a:solidFill>
+                  <a:srgbClr val="8EDBD4"/>
+                </a:solidFill>
+                <a:latin typeface="Arial"/>
+              </a:rPr>
+              <a:t>Terms that change the bubble temperature (illustrative, W)</a:t>
+            </a:r>
+          </a:p>
+        </p:txBody>
+      </p:sp>
+      <p:cxnSp>
+        <p:nvCxnSpPr>
+          <p:cNvPr id="13" name="C2-E23 line 11" descr="sci-ppt:o011"/>
+          <p:cNvCxnSpPr/>
+          <p:nvPr/>
+        </p:nvCxnSpPr>
+        <p:spPr>
+          <a:xfrm>
+            <a:off x="5943600" y="4663440"/>
+            <a:ext cx="5760720" cy="0"/>
+          </a:xfrm>
+          <a:prstGeom prst="line">
+            <a:avLst/>
+          </a:prstGeom>
           <a:ln w="19050">
             <a:solidFill>
               <a:srgbClr val="B4C7D2"/>
@@ -3160,24 +3565,83 @@
           </a:ln>
           <a:effectLst/>
         </p:spPr>
-        <p:txBody>
-          <a:bodyPr rtlCol="0" anchor="ctr"/>
-          <a:lstStyle/>
-          <a:p>
-            <a:pPr algn="ctr"/>
-          </a:p>
-        </p:txBody>
-      </p:sp>
-      <p:sp>
-        <p:nvSpPr>
-          <p:cNvPr id="4" name="text3" descr="sci-ppt:C2-E23-003"/>
+      </p:cxnSp>
+      <p:cxnSp>
+        <p:nvCxnSpPr>
+          <p:cNvPr id="14" name="C2-E23 line 12" descr="sci-ppt:o012"/>
+          <p:cNvCxnSpPr/>
+          <p:nvPr/>
+        </p:nvCxnSpPr>
+        <p:spPr>
+          <a:xfrm>
+            <a:off x="5943600" y="1554480"/>
+            <a:ext cx="0" cy="3108960"/>
+          </a:xfrm>
+          <a:prstGeom prst="line">
+            <a:avLst/>
+          </a:prstGeom>
+          <a:ln w="19050">
+            <a:solidFill>
+              <a:srgbClr val="B4C7D2"/>
+            </a:solidFill>
+          </a:ln>
+          <a:effectLst/>
+        </p:spPr>
+      </p:cxnSp>
+      <p:cxnSp>
+        <p:nvCxnSpPr>
+          <p:cNvPr id="15" name="C2-E23 line 13" descr="sci-ppt:o013"/>
+          <p:cNvCxnSpPr/>
+          <p:nvPr/>
+        </p:nvCxnSpPr>
+        <p:spPr>
+          <a:xfrm>
+            <a:off x="5879592" y="4663440"/>
+            <a:ext cx="64008" cy="0"/>
+          </a:xfrm>
+          <a:prstGeom prst="line">
+            <a:avLst/>
+          </a:prstGeom>
+          <a:ln w="12700">
+            <a:solidFill>
+              <a:srgbClr val="B4C7D2"/>
+            </a:solidFill>
+          </a:ln>
+          <a:effectLst/>
+        </p:spPr>
+      </p:cxnSp>
+      <p:cxnSp>
+        <p:nvCxnSpPr>
+          <p:cNvPr id="16" name="C2-E23 line 14" descr="sci-ppt:o014"/>
+          <p:cNvCxnSpPr/>
+          <p:nvPr/>
+        </p:nvCxnSpPr>
+        <p:spPr>
+          <a:xfrm>
+            <a:off x="5943600" y="4663440"/>
+            <a:ext cx="5760720" cy="0"/>
+          </a:xfrm>
+          <a:prstGeom prst="line">
+            <a:avLst/>
+          </a:prstGeom>
+          <a:ln w="7620">
+            <a:solidFill>
+              <a:srgbClr val="2E4756"/>
+            </a:solidFill>
+          </a:ln>
+          <a:effectLst/>
+        </p:spPr>
+      </p:cxnSp>
+      <p:sp>
+        <p:nvSpPr>
+          <p:cNvPr id="17" name="C2-E23 text 15" descr="sci-ppt:o015"/>
           <p:cNvSpPr txBox="1"/>
           <p:nvPr/>
         </p:nvSpPr>
         <p:spPr>
           <a:xfrm>
-            <a:off x="4145280" y="2072640"/>
-            <a:ext cx="3474720" cy="340156"/>
+            <a:off x="5074920" y="4581144"/>
+            <a:ext cx="777240" cy="208407"/>
           </a:xfrm>
           <a:prstGeom prst="rect">
             <a:avLst/>
@@ -3186,7 +3650,763 @@
           <a:effectLst/>
         </p:spPr>
         <p:txBody>
-          <a:bodyPr wrap="none" lIns="27432" rIns="27432" tIns="18288" bIns="18288" anchor="ctr">
+          <a:bodyPr wrap="none" lIns="18288" rIns="18288" tIns="18288" bIns="18288" anchor="t">
+            <a:spAutoFit/>
+          </a:bodyPr>
+          <a:lstStyle/>
+          <a:p>
+            <a:pPr algn="r">
+              <a:spcAft>
+                <a:spcPts val="0"/>
+              </a:spcAft>
+            </a:pPr>
+            <a:r>
+              <a:rPr sz="1050" b="0" i="0">
+                <a:solidFill>
+                  <a:srgbClr val="B4C7D2"/>
+                </a:solidFill>
+                <a:latin typeface="Arial"/>
+              </a:rPr>
+              <a:t>0</a:t>
+            </a:r>
+          </a:p>
+        </p:txBody>
+      </p:sp>
+      <p:cxnSp>
+        <p:nvCxnSpPr>
+          <p:cNvPr id="18" name="C2-E23 line 16" descr="sci-ppt:o016"/>
+          <p:cNvCxnSpPr/>
+          <p:nvPr/>
+        </p:nvCxnSpPr>
+        <p:spPr>
+          <a:xfrm>
+            <a:off x="5879592" y="3845292"/>
+            <a:ext cx="64008" cy="0"/>
+          </a:xfrm>
+          <a:prstGeom prst="line">
+            <a:avLst/>
+          </a:prstGeom>
+          <a:ln w="12700">
+            <a:solidFill>
+              <a:srgbClr val="B4C7D2"/>
+            </a:solidFill>
+          </a:ln>
+          <a:effectLst/>
+        </p:spPr>
+      </p:cxnSp>
+      <p:cxnSp>
+        <p:nvCxnSpPr>
+          <p:cNvPr id="19" name="C2-E23 line 17" descr="sci-ppt:o017"/>
+          <p:cNvCxnSpPr/>
+          <p:nvPr/>
+        </p:nvCxnSpPr>
+        <p:spPr>
+          <a:xfrm>
+            <a:off x="5943600" y="3845292"/>
+            <a:ext cx="5760720" cy="0"/>
+          </a:xfrm>
+          <a:prstGeom prst="line">
+            <a:avLst/>
+          </a:prstGeom>
+          <a:ln w="7620">
+            <a:solidFill>
+              <a:srgbClr val="2E4756"/>
+            </a:solidFill>
+          </a:ln>
+          <a:effectLst/>
+        </p:spPr>
+      </p:cxnSp>
+      <p:sp>
+        <p:nvSpPr>
+          <p:cNvPr id="20" name="C2-E23 text 18" descr="sci-ppt:o018"/>
+          <p:cNvSpPr txBox="1"/>
+          <p:nvPr/>
+        </p:nvSpPr>
+        <p:spPr>
+          <a:xfrm>
+            <a:off x="5074920" y="3762996"/>
+            <a:ext cx="777240" cy="208407"/>
+          </a:xfrm>
+          <a:prstGeom prst="rect">
+            <a:avLst/>
+          </a:prstGeom>
+          <a:noFill/>
+          <a:effectLst/>
+        </p:spPr>
+        <p:txBody>
+          <a:bodyPr wrap="none" lIns="18288" rIns="18288" tIns="18288" bIns="18288" anchor="t">
+            <a:spAutoFit/>
+          </a:bodyPr>
+          <a:lstStyle/>
+          <a:p>
+            <a:pPr algn="r">
+              <a:spcAft>
+                <a:spcPts val="0"/>
+              </a:spcAft>
+            </a:pPr>
+            <a:r>
+              <a:rPr sz="1050" b="0" i="0">
+                <a:solidFill>
+                  <a:srgbClr val="B4C7D2"/>
+                </a:solidFill>
+                <a:latin typeface="Arial"/>
+              </a:rPr>
+              <a:t>0.5</a:t>
+            </a:r>
+          </a:p>
+        </p:txBody>
+      </p:sp>
+      <p:cxnSp>
+        <p:nvCxnSpPr>
+          <p:cNvPr id="21" name="C2-E23 line 19" descr="sci-ppt:o019"/>
+          <p:cNvCxnSpPr/>
+          <p:nvPr/>
+        </p:nvCxnSpPr>
+        <p:spPr>
+          <a:xfrm>
+            <a:off x="5879592" y="3027145"/>
+            <a:ext cx="64008" cy="0"/>
+          </a:xfrm>
+          <a:prstGeom prst="line">
+            <a:avLst/>
+          </a:prstGeom>
+          <a:ln w="12700">
+            <a:solidFill>
+              <a:srgbClr val="B4C7D2"/>
+            </a:solidFill>
+          </a:ln>
+          <a:effectLst/>
+        </p:spPr>
+      </p:cxnSp>
+      <p:cxnSp>
+        <p:nvCxnSpPr>
+          <p:cNvPr id="22" name="C2-E23 line 20" descr="sci-ppt:o020"/>
+          <p:cNvCxnSpPr/>
+          <p:nvPr/>
+        </p:nvCxnSpPr>
+        <p:spPr>
+          <a:xfrm>
+            <a:off x="5943600" y="3027145"/>
+            <a:ext cx="5760720" cy="0"/>
+          </a:xfrm>
+          <a:prstGeom prst="line">
+            <a:avLst/>
+          </a:prstGeom>
+          <a:ln w="7620">
+            <a:solidFill>
+              <a:srgbClr val="2E4756"/>
+            </a:solidFill>
+          </a:ln>
+          <a:effectLst/>
+        </p:spPr>
+      </p:cxnSp>
+      <p:sp>
+        <p:nvSpPr>
+          <p:cNvPr id="23" name="C2-E23 text 21" descr="sci-ppt:o021"/>
+          <p:cNvSpPr txBox="1"/>
+          <p:nvPr/>
+        </p:nvSpPr>
+        <p:spPr>
+          <a:xfrm>
+            <a:off x="5074920" y="2944849"/>
+            <a:ext cx="777240" cy="208407"/>
+          </a:xfrm>
+          <a:prstGeom prst="rect">
+            <a:avLst/>
+          </a:prstGeom>
+          <a:noFill/>
+          <a:effectLst/>
+        </p:spPr>
+        <p:txBody>
+          <a:bodyPr wrap="none" lIns="18288" rIns="18288" tIns="18288" bIns="18288" anchor="t">
+            <a:spAutoFit/>
+          </a:bodyPr>
+          <a:lstStyle/>
+          <a:p>
+            <a:pPr algn="r">
+              <a:spcAft>
+                <a:spcPts val="0"/>
+              </a:spcAft>
+            </a:pPr>
+            <a:r>
+              <a:rPr sz="1050" b="0" i="0">
+                <a:solidFill>
+                  <a:srgbClr val="B4C7D2"/>
+                </a:solidFill>
+                <a:latin typeface="Arial"/>
+              </a:rPr>
+              <a:t>1</a:t>
+            </a:r>
+          </a:p>
+        </p:txBody>
+      </p:sp>
+      <p:cxnSp>
+        <p:nvCxnSpPr>
+          <p:cNvPr id="24" name="C2-E23 line 22" descr="sci-ppt:o022"/>
+          <p:cNvCxnSpPr/>
+          <p:nvPr/>
+        </p:nvCxnSpPr>
+        <p:spPr>
+          <a:xfrm>
+            <a:off x="5879592" y="2208997"/>
+            <a:ext cx="64008" cy="0"/>
+          </a:xfrm>
+          <a:prstGeom prst="line">
+            <a:avLst/>
+          </a:prstGeom>
+          <a:ln w="12700">
+            <a:solidFill>
+              <a:srgbClr val="B4C7D2"/>
+            </a:solidFill>
+          </a:ln>
+          <a:effectLst/>
+        </p:spPr>
+      </p:cxnSp>
+      <p:cxnSp>
+        <p:nvCxnSpPr>
+          <p:cNvPr id="25" name="C2-E23 line 23" descr="sci-ppt:o023"/>
+          <p:cNvCxnSpPr/>
+          <p:nvPr/>
+        </p:nvCxnSpPr>
+        <p:spPr>
+          <a:xfrm>
+            <a:off x="5943600" y="2208997"/>
+            <a:ext cx="5760720" cy="0"/>
+          </a:xfrm>
+          <a:prstGeom prst="line">
+            <a:avLst/>
+          </a:prstGeom>
+          <a:ln w="7620">
+            <a:solidFill>
+              <a:srgbClr val="2E4756"/>
+            </a:solidFill>
+          </a:ln>
+          <a:effectLst/>
+        </p:spPr>
+      </p:cxnSp>
+      <p:sp>
+        <p:nvSpPr>
+          <p:cNvPr id="26" name="C2-E23 text 24" descr="sci-ppt:o024"/>
+          <p:cNvSpPr txBox="1"/>
+          <p:nvPr/>
+        </p:nvSpPr>
+        <p:spPr>
+          <a:xfrm>
+            <a:off x="5074920" y="2126701"/>
+            <a:ext cx="777240" cy="208407"/>
+          </a:xfrm>
+          <a:prstGeom prst="rect">
+            <a:avLst/>
+          </a:prstGeom>
+          <a:noFill/>
+          <a:effectLst/>
+        </p:spPr>
+        <p:txBody>
+          <a:bodyPr wrap="none" lIns="18288" rIns="18288" tIns="18288" bIns="18288" anchor="t">
+            <a:spAutoFit/>
+          </a:bodyPr>
+          <a:lstStyle/>
+          <a:p>
+            <a:pPr algn="r">
+              <a:spcAft>
+                <a:spcPts val="0"/>
+              </a:spcAft>
+            </a:pPr>
+            <a:r>
+              <a:rPr sz="1050" b="0" i="0">
+                <a:solidFill>
+                  <a:srgbClr val="B4C7D2"/>
+                </a:solidFill>
+                <a:latin typeface="Arial"/>
+              </a:rPr>
+              <a:t>1.5</a:t>
+            </a:r>
+          </a:p>
+        </p:txBody>
+      </p:sp>
+      <p:sp>
+        <p:nvSpPr>
+          <p:cNvPr id="27" name="C2-E23 rect 25" descr="sci-ppt:o025"/>
+          <p:cNvSpPr/>
+          <p:nvPr/>
+        </p:nvSpPr>
+        <p:spPr>
+          <a:xfrm>
+            <a:off x="6145225" y="2536256"/>
+            <a:ext cx="1036929" cy="2127183"/>
+          </a:xfrm>
+          <a:prstGeom prst="rect">
+            <a:avLst/>
+          </a:prstGeom>
+          <a:solidFill>
+            <a:srgbClr val="8EDBD4">
+              <a:alpha val="85000"/>
+            </a:srgbClr>
+          </a:solidFill>
+          <a:ln w="12700">
+            <a:solidFill>
+              <a:srgbClr val="8EDBD4">
+                <a:alpha val="85000"/>
+              </a:srgbClr>
+            </a:solidFill>
+          </a:ln>
+          <a:effectLst/>
+        </p:spPr>
+        <p:txBody>
+          <a:bodyPr rtlCol="0" anchor="ctr"/>
+          <a:lstStyle/>
+          <a:p>
+            <a:pPr algn="ctr"/>
+          </a:p>
+        </p:txBody>
+      </p:sp>
+      <p:sp>
+        <p:nvSpPr>
+          <p:cNvPr id="28" name="C2-E23 text 26" descr="sci-ppt:o026"/>
+          <p:cNvSpPr txBox="1"/>
+          <p:nvPr/>
+        </p:nvSpPr>
+        <p:spPr>
+          <a:xfrm>
+            <a:off x="5916625" y="2261936"/>
+            <a:ext cx="1494129" cy="223900"/>
+          </a:xfrm>
+          <a:prstGeom prst="rect">
+            <a:avLst/>
+          </a:prstGeom>
+          <a:noFill/>
+          <a:effectLst/>
+        </p:spPr>
+        <p:txBody>
+          <a:bodyPr wrap="none" lIns="18288" rIns="18288" tIns="18288" bIns="18288" anchor="t">
+            <a:spAutoFit/>
+          </a:bodyPr>
+          <a:lstStyle/>
+          <a:p>
+            <a:pPr algn="ctr">
+              <a:spcAft>
+                <a:spcPts val="0"/>
+              </a:spcAft>
+            </a:pPr>
+            <a:r>
+              <a:rPr sz="1150" b="1" i="0">
+                <a:solidFill>
+                  <a:srgbClr val="E7F0F3"/>
+                </a:solidFill>
+                <a:latin typeface="Arial"/>
+              </a:rPr>
+              <a:t>1.30</a:t>
+            </a:r>
+          </a:p>
+        </p:txBody>
+      </p:sp>
+      <p:sp>
+        <p:nvSpPr>
+          <p:cNvPr id="29" name="C2-E23 text 27" descr="sci-ppt:o027"/>
+          <p:cNvSpPr txBox="1"/>
+          <p:nvPr/>
+        </p:nvSpPr>
+        <p:spPr>
+          <a:xfrm>
+            <a:off x="5870905" y="4736592"/>
+            <a:ext cx="1585569" cy="216153"/>
+          </a:xfrm>
+          <a:prstGeom prst="rect">
+            <a:avLst/>
+          </a:prstGeom>
+          <a:noFill/>
+          <a:effectLst/>
+        </p:spPr>
+        <p:txBody>
+          <a:bodyPr wrap="none" lIns="18288" rIns="18288" tIns="18288" bIns="18288" anchor="t">
+            <a:spAutoFit/>
+          </a:bodyPr>
+          <a:lstStyle/>
+          <a:p>
+            <a:pPr algn="ctr">
+              <a:spcAft>
+                <a:spcPts val="0"/>
+              </a:spcAft>
+            </a:pPr>
+            <a:r>
+              <a:rPr sz="1100" b="0" i="0">
+                <a:solidFill>
+                  <a:srgbClr val="B4C7D2"/>
+                </a:solidFill>
+                <a:latin typeface="Arial"/>
+              </a:rPr>
+              <a:t>Σ(h−e)ṁ</a:t>
+            </a:r>
+          </a:p>
+        </p:txBody>
+      </p:sp>
+      <p:sp>
+        <p:nvSpPr>
+          <p:cNvPr id="30" name="C2-E23 rect 28" descr="sci-ppt:o028"/>
+          <p:cNvSpPr/>
+          <p:nvPr/>
+        </p:nvSpPr>
+        <p:spPr>
+          <a:xfrm>
+            <a:off x="7585405" y="2045368"/>
+            <a:ext cx="1036929" cy="490888"/>
+          </a:xfrm>
+          <a:prstGeom prst="rect">
+            <a:avLst/>
+          </a:prstGeom>
+          <a:solidFill>
+            <a:srgbClr val="F28BA0">
+              <a:alpha val="85000"/>
+            </a:srgbClr>
+          </a:solidFill>
+          <a:ln w="12700">
+            <a:solidFill>
+              <a:srgbClr val="F28BA0">
+                <a:alpha val="85000"/>
+              </a:srgbClr>
+            </a:solidFill>
+          </a:ln>
+          <a:effectLst/>
+        </p:spPr>
+        <p:txBody>
+          <a:bodyPr rtlCol="0" anchor="ctr"/>
+          <a:lstStyle/>
+          <a:p>
+            <a:pPr algn="ctr"/>
+          </a:p>
+        </p:txBody>
+      </p:sp>
+      <p:sp>
+        <p:nvSpPr>
+          <p:cNvPr id="31" name="C2-E23 text 29" descr="sci-ppt:o029"/>
+          <p:cNvSpPr txBox="1"/>
+          <p:nvPr/>
+        </p:nvSpPr>
+        <p:spPr>
+          <a:xfrm>
+            <a:off x="7356805" y="1771048"/>
+            <a:ext cx="1494129" cy="223900"/>
+          </a:xfrm>
+          <a:prstGeom prst="rect">
+            <a:avLst/>
+          </a:prstGeom>
+          <a:noFill/>
+          <a:effectLst/>
+        </p:spPr>
+        <p:txBody>
+          <a:bodyPr wrap="none" lIns="18288" rIns="18288" tIns="18288" bIns="18288" anchor="t">
+            <a:spAutoFit/>
+          </a:bodyPr>
+          <a:lstStyle/>
+          <a:p>
+            <a:pPr algn="ctr">
+              <a:spcAft>
+                <a:spcPts val="0"/>
+              </a:spcAft>
+            </a:pPr>
+            <a:r>
+              <a:rPr sz="1150" b="1" i="0">
+                <a:solidFill>
+                  <a:srgbClr val="E7F0F3"/>
+                </a:solidFill>
+                <a:latin typeface="Arial"/>
+              </a:rPr>
+              <a:t>+0.30</a:t>
+            </a:r>
+          </a:p>
+        </p:txBody>
+      </p:sp>
+      <p:sp>
+        <p:nvSpPr>
+          <p:cNvPr id="32" name="C2-E23 text 30" descr="sci-ppt:o030"/>
+          <p:cNvSpPr txBox="1"/>
+          <p:nvPr/>
+        </p:nvSpPr>
+        <p:spPr>
+          <a:xfrm>
+            <a:off x="7311085" y="4736592"/>
+            <a:ext cx="1585569" cy="216153"/>
+          </a:xfrm>
+          <a:prstGeom prst="rect">
+            <a:avLst/>
+          </a:prstGeom>
+          <a:noFill/>
+          <a:effectLst/>
+        </p:spPr>
+        <p:txBody>
+          <a:bodyPr wrap="none" lIns="18288" rIns="18288" tIns="18288" bIns="18288" anchor="t">
+            <a:spAutoFit/>
+          </a:bodyPr>
+          <a:lstStyle/>
+          <a:p>
+            <a:pPr algn="ctr">
+              <a:spcAft>
+                <a:spcPts val="0"/>
+              </a:spcAft>
+            </a:pPr>
+            <a:r>
+              <a:rPr sz="1100" b="0" i="0">
+                <a:solidFill>
+                  <a:srgbClr val="B4C7D2"/>
+                </a:solidFill>
+                <a:latin typeface="Arial"/>
+              </a:rPr>
+              <a:t>Q̇_b</a:t>
+            </a:r>
+          </a:p>
+        </p:txBody>
+      </p:sp>
+      <p:sp>
+        <p:nvSpPr>
+          <p:cNvPr id="33" name="C2-E23 rect 31" descr="sci-ppt:o031"/>
+          <p:cNvSpPr/>
+          <p:nvPr/>
+        </p:nvSpPr>
+        <p:spPr>
+          <a:xfrm>
+            <a:off x="9025585" y="2045368"/>
+            <a:ext cx="1036929" cy="1472665"/>
+          </a:xfrm>
+          <a:prstGeom prst="rect">
+            <a:avLst/>
+          </a:prstGeom>
+          <a:solidFill>
+            <a:srgbClr val="F2B880">
+              <a:alpha val="85000"/>
+            </a:srgbClr>
+          </a:solidFill>
+          <a:ln w="12700">
+            <a:solidFill>
+              <a:srgbClr val="F2B880">
+                <a:alpha val="85000"/>
+              </a:srgbClr>
+            </a:solidFill>
+          </a:ln>
+          <a:effectLst/>
+        </p:spPr>
+        <p:txBody>
+          <a:bodyPr rtlCol="0" anchor="ctr"/>
+          <a:lstStyle/>
+          <a:p>
+            <a:pPr algn="ctr"/>
+          </a:p>
+        </p:txBody>
+      </p:sp>
+      <p:sp>
+        <p:nvSpPr>
+          <p:cNvPr id="34" name="C2-E23 text 32" descr="sci-ppt:o032"/>
+          <p:cNvSpPr txBox="1"/>
+          <p:nvPr/>
+        </p:nvSpPr>
+        <p:spPr>
+          <a:xfrm>
+            <a:off x="8796985" y="1771048"/>
+            <a:ext cx="1494129" cy="223900"/>
+          </a:xfrm>
+          <a:prstGeom prst="rect">
+            <a:avLst/>
+          </a:prstGeom>
+          <a:noFill/>
+          <a:effectLst/>
+        </p:spPr>
+        <p:txBody>
+          <a:bodyPr wrap="none" lIns="18288" rIns="18288" tIns="18288" bIns="18288" anchor="t">
+            <a:spAutoFit/>
+          </a:bodyPr>
+          <a:lstStyle/>
+          <a:p>
+            <a:pPr algn="ctr">
+              <a:spcAft>
+                <a:spcPts val="0"/>
+              </a:spcAft>
+            </a:pPr>
+            <a:r>
+              <a:rPr sz="1150" b="1" i="0">
+                <a:solidFill>
+                  <a:srgbClr val="E7F0F3"/>
+                </a:solidFill>
+                <a:latin typeface="Arial"/>
+              </a:rPr>
+              <a:t>-0.90</a:t>
+            </a:r>
+          </a:p>
+        </p:txBody>
+      </p:sp>
+      <p:sp>
+        <p:nvSpPr>
+          <p:cNvPr id="35" name="C2-E23 text 33" descr="sci-ppt:o033"/>
+          <p:cNvSpPr txBox="1"/>
+          <p:nvPr/>
+        </p:nvSpPr>
+        <p:spPr>
+          <a:xfrm>
+            <a:off x="8751265" y="4736592"/>
+            <a:ext cx="1585569" cy="216153"/>
+          </a:xfrm>
+          <a:prstGeom prst="rect">
+            <a:avLst/>
+          </a:prstGeom>
+          <a:noFill/>
+          <a:effectLst/>
+        </p:spPr>
+        <p:txBody>
+          <a:bodyPr wrap="none" lIns="18288" rIns="18288" tIns="18288" bIns="18288" anchor="t">
+            <a:spAutoFit/>
+          </a:bodyPr>
+          <a:lstStyle/>
+          <a:p>
+            <a:pPr algn="ctr">
+              <a:spcAft>
+                <a:spcPts val="0"/>
+              </a:spcAft>
+            </a:pPr>
+            <a:r>
+              <a:rPr sz="1100" b="0" i="0">
+                <a:solidFill>
+                  <a:srgbClr val="B4C7D2"/>
+                </a:solidFill>
+                <a:latin typeface="Arial"/>
+              </a:rPr>
+              <a:t>−p V̇</a:t>
+            </a:r>
+          </a:p>
+        </p:txBody>
+      </p:sp>
+      <p:sp>
+        <p:nvSpPr>
+          <p:cNvPr id="36" name="C2-E23 rect 34" descr="sci-ppt:o034"/>
+          <p:cNvSpPr/>
+          <p:nvPr/>
+        </p:nvSpPr>
+        <p:spPr>
+          <a:xfrm>
+            <a:off x="10465765" y="3518033"/>
+            <a:ext cx="1036929" cy="1145406"/>
+          </a:xfrm>
+          <a:prstGeom prst="rect">
+            <a:avLst/>
+          </a:prstGeom>
+          <a:solidFill>
+            <a:srgbClr val="7FC8F8">
+              <a:alpha val="85000"/>
+            </a:srgbClr>
+          </a:solidFill>
+          <a:ln w="12700">
+            <a:solidFill>
+              <a:srgbClr val="7FC8F8">
+                <a:alpha val="85000"/>
+              </a:srgbClr>
+            </a:solidFill>
+          </a:ln>
+          <a:effectLst/>
+        </p:spPr>
+        <p:txBody>
+          <a:bodyPr rtlCol="0" anchor="ctr"/>
+          <a:lstStyle/>
+          <a:p>
+            <a:pPr algn="ctr"/>
+          </a:p>
+        </p:txBody>
+      </p:sp>
+      <p:sp>
+        <p:nvSpPr>
+          <p:cNvPr id="37" name="C2-E23 text 35" descr="sci-ppt:o035"/>
+          <p:cNvSpPr txBox="1"/>
+          <p:nvPr/>
+        </p:nvSpPr>
+        <p:spPr>
+          <a:xfrm>
+            <a:off x="10237165" y="3243713"/>
+            <a:ext cx="1494129" cy="223900"/>
+          </a:xfrm>
+          <a:prstGeom prst="rect">
+            <a:avLst/>
+          </a:prstGeom>
+          <a:noFill/>
+          <a:effectLst/>
+        </p:spPr>
+        <p:txBody>
+          <a:bodyPr wrap="none" lIns="18288" rIns="18288" tIns="18288" bIns="18288" anchor="t">
+            <a:spAutoFit/>
+          </a:bodyPr>
+          <a:lstStyle/>
+          <a:p>
+            <a:pPr algn="ctr">
+              <a:spcAft>
+                <a:spcPts val="0"/>
+              </a:spcAft>
+            </a:pPr>
+            <a:r>
+              <a:rPr sz="1150" b="1" i="0">
+                <a:solidFill>
+                  <a:srgbClr val="E7F0F3"/>
+                </a:solidFill>
+                <a:latin typeface="Arial"/>
+              </a:rPr>
+              <a:t>0.70</a:t>
+            </a:r>
+          </a:p>
+        </p:txBody>
+      </p:sp>
+      <p:sp>
+        <p:nvSpPr>
+          <p:cNvPr id="38" name="C2-E23 text 36" descr="sci-ppt:o036"/>
+          <p:cNvSpPr txBox="1"/>
+          <p:nvPr/>
+        </p:nvSpPr>
+        <p:spPr>
+          <a:xfrm>
+            <a:off x="10191445" y="4736592"/>
+            <a:ext cx="1585569" cy="216153"/>
+          </a:xfrm>
+          <a:prstGeom prst="rect">
+            <a:avLst/>
+          </a:prstGeom>
+          <a:noFill/>
+          <a:effectLst/>
+        </p:spPr>
+        <p:txBody>
+          <a:bodyPr wrap="none" lIns="18288" rIns="18288" tIns="18288" bIns="18288" anchor="t">
+            <a:spAutoFit/>
+          </a:bodyPr>
+          <a:lstStyle/>
+          <a:p>
+            <a:pPr algn="ctr">
+              <a:spcAft>
+                <a:spcPts val="0"/>
+              </a:spcAft>
+            </a:pPr>
+            <a:r>
+              <a:rPr sz="1100" b="0" i="0">
+                <a:solidFill>
+                  <a:srgbClr val="B4C7D2"/>
+                </a:solidFill>
+                <a:latin typeface="Arial"/>
+              </a:rPr>
+              <a:t>= (Σmcᵥ) Ṫ</a:t>
+            </a:r>
+          </a:p>
+        </p:txBody>
+      </p:sp>
+      <p:sp>
+        <p:nvSpPr>
+          <p:cNvPr id="39" name="C2-E23 text 37" descr="sci-ppt:o037"/>
+          <p:cNvSpPr txBox="1"/>
+          <p:nvPr/>
+        </p:nvSpPr>
+        <p:spPr>
+          <a:xfrm>
+            <a:off x="5760720" y="5349240"/>
+            <a:ext cx="6035040" cy="433070"/>
+          </a:xfrm>
+          <a:prstGeom prst="rect">
+            <a:avLst/>
+          </a:prstGeom>
+          <a:noFill/>
+          <a:effectLst/>
+        </p:spPr>
+        <p:txBody>
+          <a:bodyPr wrap="none" lIns="18288" rIns="18288" tIns="18288" bIns="18288" anchor="t">
             <a:spAutoFit/>
           </a:bodyPr>
           <a:lstStyle/>
@@ -3197,51 +4417,43 @@
               </a:spcAft>
             </a:pPr>
             <a:r>
-              <a:rPr sz="1728" b="0" i="0">
+              <a:rPr sz="1250" b="0" i="0">
                 <a:solidFill>
                   <a:srgbClr val="E7F0F3"/>
                 </a:solidFill>
                 <a:latin typeface="Arial"/>
               </a:rPr>
-              <a:t>Bubble energy storage U_b</a:t>
-            </a:r>
-          </a:p>
-        </p:txBody>
-      </p:sp>
-      <p:cxnSp>
-        <p:nvCxnSpPr>
-          <p:cNvPr id="5" name="arrow4" descr="sci-ppt:C2-E23-004"/>
-          <p:cNvCxnSpPr/>
-          <p:nvPr/>
-        </p:nvCxnSpPr>
-        <p:spPr>
-          <a:xfrm>
-            <a:off x="1219200" y="2560320"/>
-            <a:ext cx="2682240" cy="0"/>
-          </a:xfrm>
-          <a:prstGeom prst="line">
-            <a:avLst/>
-          </a:prstGeom>
-          <a:ln w="25400">
-            <a:solidFill>
-              <a:srgbClr val="8EDBD4"/>
-            </a:solidFill>
-            <a:headEnd type="none" w="med" len="med"/>
-            <a:tailEnd type="triangle" w="med" len="med"/>
-          </a:ln>
-          <a:effectLst/>
-        </p:spPr>
-      </p:cxnSp>
-      <p:sp>
-        <p:nvSpPr>
-          <p:cNvPr id="6" name="text5" descr="sci-ppt:C2-E23-005"/>
+              <a:t>A fixed-mass polytropic law cannot hold while ṁᵥ,s ≠ 0: the mass terms</a:t>
+            </a:r>
+          </a:p>
+          <a:p>
+            <a:pPr algn="l">
+              <a:spcAft>
+                <a:spcPts val="0"/>
+              </a:spcAft>
+            </a:pPr>
+            <a:r>
+              <a:rPr sz="1250" b="0" i="0">
+                <a:solidFill>
+                  <a:srgbClr val="E7F0F3"/>
+                </a:solidFill>
+                <a:latin typeface="Arial"/>
+              </a:rPr>
+              <a:t>change the temperature as well.</a:t>
+            </a:r>
+          </a:p>
+        </p:txBody>
+      </p:sp>
+      <p:sp>
+        <p:nvSpPr>
+          <p:cNvPr id="40" name="C2-E23 text 38" descr="sci-ppt:o038"/>
           <p:cNvSpPr txBox="1"/>
           <p:nvPr/>
         </p:nvSpPr>
         <p:spPr>
           <a:xfrm>
-            <a:off x="1097280" y="1524000"/>
-            <a:ext cx="2804160" cy="359054"/>
+            <a:off x="320040" y="6510528"/>
+            <a:ext cx="11521440" cy="200660"/>
           </a:xfrm>
           <a:prstGeom prst="rect">
             <a:avLst/>
@@ -3250,7 +4462,7 @@
           <a:effectLst/>
         </p:spPr>
         <p:txBody>
-          <a:bodyPr wrap="none" lIns="27432" rIns="27432" tIns="18288" bIns="18288" anchor="ctr">
+          <a:bodyPr wrap="none" lIns="18288" rIns="18288" tIns="18288" bIns="18288" anchor="t">
             <a:spAutoFit/>
           </a:bodyPr>
           <a:lstStyle/>
@@ -3261,581 +4473,13 @@
               </a:spcAft>
             </a:pPr>
             <a:r>
-              <a:rPr sz="1823" b="0" i="0">
-                <a:solidFill>
-                  <a:srgbClr val="E7F0F3"/>
-                </a:solidFill>
-                <a:latin typeface="Arial"/>
-              </a:rPr>
-              <a:t>Heat Q̇_b</a:t>
-            </a:r>
-          </a:p>
-        </p:txBody>
-      </p:sp>
-      <p:cxnSp>
-        <p:nvCxnSpPr>
-          <p:cNvPr id="7" name="arrow6" descr="sci-ppt:C2-E23-006"/>
-          <p:cNvCxnSpPr/>
-          <p:nvPr/>
-        </p:nvCxnSpPr>
-        <p:spPr>
-          <a:xfrm>
-            <a:off x="5852160" y="1219200"/>
-            <a:ext cx="0" cy="609600"/>
-          </a:xfrm>
-          <a:prstGeom prst="line">
-            <a:avLst/>
-          </a:prstGeom>
-          <a:ln w="25400">
-            <a:solidFill>
-              <a:srgbClr val="8EDBD4"/>
-            </a:solidFill>
-            <a:headEnd type="none" w="med" len="med"/>
-            <a:tailEnd type="triangle" w="med" len="med"/>
-          </a:ln>
-          <a:effectLst/>
-        </p:spPr>
-      </p:cxnSp>
-      <p:sp>
-        <p:nvSpPr>
-          <p:cNvPr id="8" name="text7" descr="sci-ppt:C2-E23-007"/>
-          <p:cNvSpPr txBox="1"/>
-          <p:nvPr/>
-        </p:nvSpPr>
-        <p:spPr>
-          <a:xfrm>
-            <a:off x="4998720" y="792480"/>
-            <a:ext cx="4267200" cy="359054"/>
-          </a:xfrm>
-          <a:prstGeom prst="rect">
-            <a:avLst/>
-          </a:prstGeom>
-          <a:noFill/>
-          <a:effectLst/>
-        </p:spPr>
-        <p:txBody>
-          <a:bodyPr wrap="none" lIns="27432" rIns="27432" tIns="18288" bIns="18288" anchor="ctr">
-            <a:spAutoFit/>
-          </a:bodyPr>
-          <a:lstStyle/>
-          <a:p>
-            <a:pPr algn="l">
-              <a:spcAft>
-                <a:spcPts val="0"/>
-              </a:spcAft>
-            </a:pPr>
-            <a:r>
-              <a:rPr sz="1823" b="0" i="0">
-                <a:solidFill>
-                  <a:srgbClr val="E7F0F3"/>
-                </a:solidFill>
-                <a:latin typeface="Arial"/>
-              </a:rPr>
-              <a:t>Mass enthalpy entry</a:t>
-            </a:r>
-          </a:p>
-        </p:txBody>
-      </p:sp>
-      <p:cxnSp>
-        <p:nvCxnSpPr>
-          <p:cNvPr id="9" name="arrow8" descr="sci-ppt:C2-E23-008"/>
-          <p:cNvCxnSpPr/>
-          <p:nvPr/>
-        </p:nvCxnSpPr>
-        <p:spPr>
-          <a:xfrm>
-            <a:off x="7802880" y="2621280"/>
-            <a:ext cx="2682240" cy="0"/>
-          </a:xfrm>
-          <a:prstGeom prst="line">
-            <a:avLst/>
-          </a:prstGeom>
-          <a:ln w="25400">
-            <a:solidFill>
-              <a:srgbClr val="8EDBD4"/>
-            </a:solidFill>
-            <a:headEnd type="none" w="med" len="med"/>
-            <a:tailEnd type="triangle" w="med" len="med"/>
-          </a:ln>
-          <a:effectLst/>
-        </p:spPr>
-      </p:cxnSp>
-      <p:sp>
-        <p:nvSpPr>
-          <p:cNvPr id="10" name="text9" descr="sci-ppt:C2-E23-009"/>
-          <p:cNvSpPr txBox="1"/>
-          <p:nvPr/>
-        </p:nvSpPr>
-        <p:spPr>
-          <a:xfrm>
-            <a:off x="8412480" y="1767840"/>
-            <a:ext cx="3291840" cy="359054"/>
-          </a:xfrm>
-          <a:prstGeom prst="rect">
-            <a:avLst/>
-          </a:prstGeom>
-          <a:noFill/>
-          <a:effectLst/>
-        </p:spPr>
-        <p:txBody>
-          <a:bodyPr wrap="none" lIns="27432" rIns="27432" tIns="18288" bIns="18288" anchor="ctr">
-            <a:spAutoFit/>
-          </a:bodyPr>
-          <a:lstStyle/>
-          <a:p>
-            <a:pPr algn="l">
-              <a:spcAft>
-                <a:spcPts val="0"/>
-              </a:spcAft>
-            </a:pPr>
-            <a:r>
-              <a:rPr sz="1823" b="0" i="0">
-                <a:solidFill>
-                  <a:srgbClr val="E7F0F3"/>
-                </a:solidFill>
-                <a:latin typeface="Arial"/>
-              </a:rPr>
-              <a:t>Work p_b V̇_b</a:t>
-            </a:r>
-          </a:p>
-        </p:txBody>
-      </p:sp>
-      <p:sp>
-        <p:nvSpPr>
-          <p:cNvPr id="11" name="text10" descr="sci-ppt:C2-E23-010"/>
-          <p:cNvSpPr txBox="1"/>
-          <p:nvPr/>
-        </p:nvSpPr>
-        <p:spPr>
-          <a:xfrm>
-            <a:off x="1341120" y="4084320"/>
-            <a:ext cx="9997440" cy="340156"/>
-          </a:xfrm>
-          <a:prstGeom prst="rect">
-            <a:avLst/>
-          </a:prstGeom>
-          <a:noFill/>
-          <a:effectLst/>
-        </p:spPr>
-        <p:txBody>
-          <a:bodyPr wrap="none" lIns="27432" rIns="27432" tIns="18288" bIns="18288" anchor="ctr">
-            <a:spAutoFit/>
-          </a:bodyPr>
-          <a:lstStyle/>
-          <a:p>
-            <a:pPr algn="l">
-              <a:spcAft>
-                <a:spcPts val="0"/>
-              </a:spcAft>
-            </a:pPr>
-            <a:r>
-              <a:rPr sz="1728" b="0" i="0">
-                <a:solidFill>
-                  <a:srgbClr val="E7F0F3"/>
-                </a:solidFill>
-                <a:latin typeface="Arial"/>
-              </a:rPr>
-              <a:t>Conductive heat and transported enthalpy are separate terms.</a:t>
-            </a:r>
-          </a:p>
-        </p:txBody>
-      </p:sp>
-      <p:sp>
-        <p:nvSpPr>
-          <p:cNvPr id="12" name="text11" descr="sci-ppt:C2-E23-011"/>
-          <p:cNvSpPr txBox="1"/>
-          <p:nvPr/>
-        </p:nvSpPr>
-        <p:spPr>
-          <a:xfrm>
-            <a:off x="365760" y="4974336"/>
-            <a:ext cx="5547360" cy="321259"/>
-          </a:xfrm>
-          <a:prstGeom prst="rect">
-            <a:avLst/>
-          </a:prstGeom>
-          <a:noFill/>
-          <a:effectLst/>
-        </p:spPr>
-        <p:txBody>
-          <a:bodyPr wrap="none" lIns="27432" rIns="27432" tIns="18288" bIns="18288" anchor="ctr">
-            <a:spAutoFit/>
-          </a:bodyPr>
-          <a:lstStyle/>
-          <a:p>
-            <a:pPr algn="l">
-              <a:spcAft>
-                <a:spcPts val="0"/>
-              </a:spcAft>
-            </a:pPr>
-            <a:r>
-              <a:rPr sz="1632" b="0" i="0">
-                <a:solidFill>
-                  <a:srgbClr val="E7F0F3"/>
-                </a:solidFill>
-                <a:latin typeface="Arial"/>
-              </a:rPr>
-              <a:t>T_b, Ṫ_b: common vapor temperature</a:t>
-            </a:r>
-          </a:p>
-        </p:txBody>
-      </p:sp>
-      <p:sp>
-        <p:nvSpPr>
-          <p:cNvPr id="13" name="text12" descr="sci-ppt:C2-E23-012"/>
-          <p:cNvSpPr txBox="1"/>
-          <p:nvPr/>
-        </p:nvSpPr>
-        <p:spPr>
-          <a:xfrm>
-            <a:off x="365760" y="5266944"/>
-            <a:ext cx="5547360" cy="321259"/>
-          </a:xfrm>
-          <a:prstGeom prst="rect">
-            <a:avLst/>
-          </a:prstGeom>
-          <a:noFill/>
-          <a:effectLst/>
-        </p:spPr>
-        <p:txBody>
-          <a:bodyPr wrap="none" lIns="27432" rIns="27432" tIns="18288" bIns="18288" anchor="ctr">
-            <a:spAutoFit/>
-          </a:bodyPr>
-          <a:lstStyle/>
-          <a:p>
-            <a:pPr algn="l">
-              <a:spcAft>
-                <a:spcPts val="0"/>
-              </a:spcAft>
-            </a:pPr>
-            <a:r>
-              <a:rPr sz="1632" b="0" i="0">
-                <a:solidFill>
-                  <a:srgbClr val="E7F0F3"/>
-                </a:solidFill>
-                <a:latin typeface="Arial"/>
-              </a:rPr>
-              <a:t>e_s, c_v,s: internal-energy storage</a:t>
-            </a:r>
-          </a:p>
-        </p:txBody>
-      </p:sp>
-      <p:sp>
-        <p:nvSpPr>
-          <p:cNvPr id="14" name="text13" descr="sci-ppt:C2-E23-013"/>
-          <p:cNvSpPr txBox="1"/>
-          <p:nvPr/>
-        </p:nvSpPr>
-        <p:spPr>
-          <a:xfrm>
-            <a:off x="365760" y="5559552"/>
-            <a:ext cx="5547360" cy="321259"/>
-          </a:xfrm>
-          <a:prstGeom prst="rect">
-            <a:avLst/>
-          </a:prstGeom>
-          <a:noFill/>
-          <a:effectLst/>
-        </p:spPr>
-        <p:txBody>
-          <a:bodyPr wrap="none" lIns="27432" rIns="27432" tIns="18288" bIns="18288" anchor="ctr">
-            <a:spAutoFit/>
-          </a:bodyPr>
-          <a:lstStyle/>
-          <a:p>
-            <a:pPr algn="l">
-              <a:spcAft>
-                <a:spcPts val="0"/>
-              </a:spcAft>
-            </a:pPr>
-            <a:r>
-              <a:rPr sz="1632" b="0" i="0">
-                <a:solidFill>
-                  <a:srgbClr val="E7F0F3"/>
-                </a:solidFill>
-                <a:latin typeface="Arial"/>
-              </a:rPr>
-              <a:t>U_b: total stored energy</a:t>
-            </a:r>
-          </a:p>
-        </p:txBody>
-      </p:sp>
-      <p:sp>
-        <p:nvSpPr>
-          <p:cNvPr id="15" name="text14" descr="sci-ppt:C2-E23-014"/>
-          <p:cNvSpPr txBox="1"/>
-          <p:nvPr/>
-        </p:nvSpPr>
-        <p:spPr>
-          <a:xfrm>
-            <a:off x="365760" y="5852160"/>
-            <a:ext cx="5547360" cy="321259"/>
-          </a:xfrm>
-          <a:prstGeom prst="rect">
-            <a:avLst/>
-          </a:prstGeom>
-          <a:noFill/>
-          <a:effectLst/>
-        </p:spPr>
-        <p:txBody>
-          <a:bodyPr wrap="none" lIns="27432" rIns="27432" tIns="18288" bIns="18288" anchor="ctr">
-            <a:spAutoFit/>
-          </a:bodyPr>
-          <a:lstStyle/>
-          <a:p>
-            <a:pPr algn="l">
-              <a:spcAft>
-                <a:spcPts val="0"/>
-              </a:spcAft>
-            </a:pPr>
-            <a:r>
-              <a:rPr sz="1632" b="0" i="0">
-                <a:solidFill>
-                  <a:srgbClr val="E7F0F3"/>
-                </a:solidFill>
-                <a:latin typeface="Arial"/>
-              </a:rPr>
-              <a:t>p_b V̇_b: work</a:t>
-            </a:r>
-          </a:p>
-        </p:txBody>
-      </p:sp>
-      <p:sp>
-        <p:nvSpPr>
-          <p:cNvPr id="16" name="text15" descr="sci-ppt:C2-E23-015"/>
-          <p:cNvSpPr txBox="1"/>
-          <p:nvPr/>
-        </p:nvSpPr>
-        <p:spPr>
-          <a:xfrm>
-            <a:off x="6156960" y="4974336"/>
-            <a:ext cx="5547360" cy="321259"/>
-          </a:xfrm>
-          <a:prstGeom prst="rect">
-            <a:avLst/>
-          </a:prstGeom>
-          <a:noFill/>
-          <a:effectLst/>
-        </p:spPr>
-        <p:txBody>
-          <a:bodyPr wrap="none" lIns="27432" rIns="27432" tIns="18288" bIns="18288" anchor="ctr">
-            <a:spAutoFit/>
-          </a:bodyPr>
-          <a:lstStyle/>
-          <a:p>
-            <a:pPr algn="l">
-              <a:spcAft>
-                <a:spcPts val="0"/>
-              </a:spcAft>
-            </a:pPr>
-            <a:r>
-              <a:rPr sz="1632" b="0" i="0">
-                <a:solidFill>
-                  <a:srgbClr val="E7F0F3"/>
-                </a:solidFill>
-                <a:latin typeface="Arial"/>
-              </a:rPr>
-              <a:t>m_v,s, ṁ_v,s: changing species mass</a:t>
-            </a:r>
-          </a:p>
-        </p:txBody>
-      </p:sp>
-      <p:sp>
-        <p:nvSpPr>
-          <p:cNvPr id="17" name="text16" descr="sci-ppt:C2-E23-016"/>
-          <p:cNvSpPr txBox="1"/>
-          <p:nvPr/>
-        </p:nvSpPr>
-        <p:spPr>
-          <a:xfrm>
-            <a:off x="6156960" y="5266944"/>
-            <a:ext cx="5547360" cy="321259"/>
-          </a:xfrm>
-          <a:prstGeom prst="rect">
-            <a:avLst/>
-          </a:prstGeom>
-          <a:noFill/>
-          <a:effectLst/>
-        </p:spPr>
-        <p:txBody>
-          <a:bodyPr wrap="none" lIns="27432" rIns="27432" tIns="18288" bIns="18288" anchor="ctr">
-            <a:spAutoFit/>
-          </a:bodyPr>
-          <a:lstStyle/>
-          <a:p>
-            <a:pPr algn="l">
-              <a:spcAft>
-                <a:spcPts val="0"/>
-              </a:spcAft>
-            </a:pPr>
-            <a:r>
-              <a:rPr sz="1632" b="0" i="0">
-                <a:solidFill>
-                  <a:srgbClr val="E7F0F3"/>
-                </a:solidFill>
-                <a:latin typeface="Arial"/>
-              </a:rPr>
-              <a:t>h_v,s: boundary enthalpy</a:t>
-            </a:r>
-          </a:p>
-        </p:txBody>
-      </p:sp>
-      <p:sp>
-        <p:nvSpPr>
-          <p:cNvPr id="18" name="text17" descr="sci-ppt:C2-E23-017"/>
-          <p:cNvSpPr txBox="1"/>
-          <p:nvPr/>
-        </p:nvSpPr>
-        <p:spPr>
-          <a:xfrm>
-            <a:off x="6156960" y="5559552"/>
-            <a:ext cx="5547360" cy="321259"/>
-          </a:xfrm>
-          <a:prstGeom prst="rect">
-            <a:avLst/>
-          </a:prstGeom>
-          <a:noFill/>
-          <a:effectLst/>
-        </p:spPr>
-        <p:txBody>
-          <a:bodyPr wrap="none" lIns="27432" rIns="27432" tIns="18288" bIns="18288" anchor="ctr">
-            <a:spAutoFit/>
-          </a:bodyPr>
-          <a:lstStyle/>
-          <a:p>
-            <a:pPr algn="l">
-              <a:spcAft>
-                <a:spcPts val="0"/>
-              </a:spcAft>
-            </a:pPr>
-            <a:r>
-              <a:rPr sz="1632" b="0" i="0">
-                <a:solidFill>
-                  <a:srgbClr val="E7F0F3"/>
-                </a:solidFill>
-                <a:latin typeface="Arial"/>
-              </a:rPr>
-              <a:t>Q̇_b: conduction</a:t>
-            </a:r>
-          </a:p>
-        </p:txBody>
-      </p:sp>
-      <p:sp>
-        <p:nvSpPr>
-          <p:cNvPr id="19" name="text18" descr="sci-ppt:C2-E23-018"/>
-          <p:cNvSpPr txBox="1"/>
-          <p:nvPr/>
-        </p:nvSpPr>
-        <p:spPr>
-          <a:xfrm>
-            <a:off x="6156960" y="5852160"/>
-            <a:ext cx="5547360" cy="321259"/>
-          </a:xfrm>
-          <a:prstGeom prst="rect">
-            <a:avLst/>
-          </a:prstGeom>
-          <a:noFill/>
-          <a:effectLst/>
-        </p:spPr>
-        <p:txBody>
-          <a:bodyPr wrap="none" lIns="27432" rIns="27432" tIns="18288" bIns="18288" anchor="ctr">
-            <a:spAutoFit/>
-          </a:bodyPr>
-          <a:lstStyle/>
-          <a:p>
-            <a:pPr algn="l">
-              <a:spcAft>
-                <a:spcPts val="0"/>
-              </a:spcAft>
-            </a:pPr>
-            <a:r>
-              <a:rPr sz="1632" b="0" i="0">
-                <a:solidFill>
-                  <a:srgbClr val="E7F0F3"/>
-                </a:solidFill>
-                <a:latin typeface="Arial"/>
-              </a:rPr>
-              <a:t>s = 1…N_s: summation</a:t>
-            </a:r>
-          </a:p>
-        </p:txBody>
-      </p:sp>
-      <p:sp>
-        <p:nvSpPr>
-          <p:cNvPr id="20" name="text19" descr="sci-ppt:C2-E23-019"/>
-          <p:cNvSpPr txBox="1"/>
-          <p:nvPr/>
-        </p:nvSpPr>
-        <p:spPr>
-          <a:xfrm>
-            <a:off x="365760" y="6339840"/>
-            <a:ext cx="11277600" cy="302361"/>
-          </a:xfrm>
-          <a:prstGeom prst="rect">
-            <a:avLst/>
-          </a:prstGeom>
-          <a:noFill/>
-          <a:effectLst/>
-        </p:spPr>
-        <p:txBody>
-          <a:bodyPr wrap="none" lIns="27432" rIns="27432" tIns="18288" bIns="18288" anchor="ctr">
-            <a:spAutoFit/>
-          </a:bodyPr>
-          <a:lstStyle/>
-          <a:p>
-            <a:pPr algn="l">
-              <a:spcAft>
-                <a:spcPts val="0"/>
-              </a:spcAft>
-            </a:pPr>
-            <a:r>
-              <a:rPr sz="1536" b="0" i="0">
+              <a:rPr sz="1000" b="0" i="0">
                 <a:solidFill>
                   <a:srgbClr val="B4C7D2"/>
                 </a:solidFill>
                 <a:latin typeface="Arial"/>
               </a:rPr>
-              <a:t>The product rule includes both temperature and mass changes</a:t>
-            </a:r>
-          </a:p>
-        </p:txBody>
-      </p:sp>
-      <p:sp>
-        <p:nvSpPr>
-          <p:cNvPr id="21" name="text20" descr="sci-ppt:C2-E23-020"/>
-          <p:cNvSpPr txBox="1"/>
-          <p:nvPr/>
-        </p:nvSpPr>
-        <p:spPr>
-          <a:xfrm>
-            <a:off x="365760" y="6632448"/>
-            <a:ext cx="11277600" cy="302361"/>
-          </a:xfrm>
-          <a:prstGeom prst="rect">
-            <a:avLst/>
-          </a:prstGeom>
-          <a:noFill/>
-          <a:effectLst/>
-        </p:spPr>
-        <p:txBody>
-          <a:bodyPr wrap="none" lIns="27432" rIns="27432" tIns="18288" bIns="18288" anchor="ctr">
-            <a:spAutoFit/>
-          </a:bodyPr>
-          <a:lstStyle/>
-          <a:p>
-            <a:pPr algn="l">
-              <a:spcAft>
-                <a:spcPts val="0"/>
-              </a:spcAft>
-            </a:pPr>
-            <a:r>
-              <a:rPr sz="1536" b="0" i="0">
-                <a:solidFill>
-                  <a:srgbClr val="B4C7D2"/>
-                </a:solidFill>
-                <a:latin typeface="Arial"/>
-              </a:rPr>
-              <a:t>Consistent energy references preserve the balance</a:t>
+              <a:t>Thermal closure of Eq. C2-E23; waterfall values are illustrative.</a:t>
             </a:r>
           </a:p>
         </p:txBody>
